--- a/newdoc/1007推进文档/1007项目进度总览_数据训练与MCP_7页.pptx
+++ b/newdoc/1007推进文档/1007项目进度总览_数据训练与MCP_7页.pptx
@@ -2,19 +2,19 @@
 <file path=ppt/presentation.xml><?xml version="1.0" encoding="utf-8"?>
 <p:presentation xmlns:p="http://schemas.openxmlformats.org/presentationml/2006/main">
   <p:sldMasterIdLst>
-    <p:sldMasterId xmlns:r="http://schemas.openxmlformats.org/officeDocument/2006/relationships" id="2147483648" r:id="Rae9f5e3af4774738"/>
+    <p:sldMasterId xmlns:r="http://schemas.openxmlformats.org/officeDocument/2006/relationships" id="2147483648" r:id="R525df94f503b4d9f"/>
   </p:sldMasterIdLst>
   <p:notesMasterIdLst>
-    <p:notesMasterId xmlns:r="http://schemas.openxmlformats.org/officeDocument/2006/relationships" r:id="R5c06993fa7cd4596"/>
+    <p:notesMasterId xmlns:r="http://schemas.openxmlformats.org/officeDocument/2006/relationships" r:id="R87109a7101f445d2"/>
   </p:notesMasterIdLst>
   <p:sldIdLst>
-    <p:sldId xmlns:r="http://schemas.openxmlformats.org/officeDocument/2006/relationships" id="256" r:id="R2fdde5fa6ee946b0"/>
-    <p:sldId xmlns:r="http://schemas.openxmlformats.org/officeDocument/2006/relationships" id="257" r:id="R220dda4dac354d40"/>
-    <p:sldId xmlns:r="http://schemas.openxmlformats.org/officeDocument/2006/relationships" id="258" r:id="R34034b9b33ed4d7f"/>
-    <p:sldId xmlns:r="http://schemas.openxmlformats.org/officeDocument/2006/relationships" id="259" r:id="Rc6e8acfaabda4af9"/>
-    <p:sldId xmlns:r="http://schemas.openxmlformats.org/officeDocument/2006/relationships" id="260" r:id="Red4ee517af094958"/>
-    <p:sldId xmlns:r="http://schemas.openxmlformats.org/officeDocument/2006/relationships" id="261" r:id="R7c62b442bccc4f38"/>
-    <p:sldId xmlns:r="http://schemas.openxmlformats.org/officeDocument/2006/relationships" id="262" r:id="Rd2ba0a8841f24520"/>
+    <p:sldId xmlns:r="http://schemas.openxmlformats.org/officeDocument/2006/relationships" id="256" r:id="R293e0323a15a433e"/>
+    <p:sldId xmlns:r="http://schemas.openxmlformats.org/officeDocument/2006/relationships" id="257" r:id="R8b571658c0c246b7"/>
+    <p:sldId xmlns:r="http://schemas.openxmlformats.org/officeDocument/2006/relationships" id="258" r:id="R11bc65d4ce794914"/>
+    <p:sldId xmlns:r="http://schemas.openxmlformats.org/officeDocument/2006/relationships" id="259" r:id="Rfe4d36ea7ca74900"/>
+    <p:sldId xmlns:r="http://schemas.openxmlformats.org/officeDocument/2006/relationships" id="260" r:id="Rb9322f5083214ec5"/>
+    <p:sldId xmlns:r="http://schemas.openxmlformats.org/officeDocument/2006/relationships" id="261" r:id="Rf04848f5a9014cc9"/>
+    <p:sldId xmlns:r="http://schemas.openxmlformats.org/officeDocument/2006/relationships" id="262" r:id="Ra6d4ba9b09eb4d15"/>
   </p:sldIdLst>
   <p:sldSz cx="12192000" cy="6858000"/>
   <p:notesSz cx="6858000" cy="9144000"/>
@@ -915,7 +915,7 @@
           <p:cNvPr id="3" name="Title">
             <a:extLst xmlns:a="http://schemas.openxmlformats.org/drawingml/2006/main">
               <a:ext uri="{FF2B5EF4-FFF2-40B4-BE49-F238E27FC236}">
-                <a16:creationId xmlns:a16="http://schemas.microsoft.com/office/drawing/2014/main" id="{D7877BBA-0DAE-41D0-8D48-C9438D3C9C3C}"/>
+                <a16:creationId xmlns:a16="http://schemas.microsoft.com/office/drawing/2014/main" id="{CD8C7ADF-FFA9-4B78-8201-F19B8C4F4486}"/>
               </a:ext>
             </a:extLst>
           </p:cNvPr>
@@ -1072,7 +1072,7 @@
           <p:cNvPr id="2" name="Subtitle">
             <a:extLst xmlns:a="http://schemas.openxmlformats.org/drawingml/2006/main">
               <a:ext uri="{FF2B5EF4-FFF2-40B4-BE49-F238E27FC236}">
-                <a16:creationId xmlns:a16="http://schemas.microsoft.com/office/drawing/2014/main" id="{EC01D14D-7628-474C-BC3A-F805A736D28C}"/>
+                <a16:creationId xmlns:a16="http://schemas.microsoft.com/office/drawing/2014/main" id="{31157F31-BE6F-4A98-844E-875E82588014}"/>
               </a:ext>
             </a:extLst>
           </p:cNvPr>
@@ -1246,7 +1246,7 @@
           <p:cNvPr id="2" name="Section title">
             <a:extLst xmlns:a="http://schemas.openxmlformats.org/drawingml/2006/main">
               <a:ext uri="{FF2B5EF4-FFF2-40B4-BE49-F238E27FC236}">
-                <a16:creationId xmlns:a16="http://schemas.microsoft.com/office/drawing/2014/main" id="{1EFF2435-69FE-45C3-BAE8-318B24846E41}"/>
+                <a16:creationId xmlns:a16="http://schemas.microsoft.com/office/drawing/2014/main" id="{BBF4CA35-D7E8-4521-8ED7-0A081ADD0AA9}"/>
               </a:ext>
             </a:extLst>
           </p:cNvPr>
@@ -1420,7 +1420,7 @@
           <p:cNvPr id="3" name="Title">
             <a:extLst xmlns:a="http://schemas.openxmlformats.org/drawingml/2006/main">
               <a:ext uri="{FF2B5EF4-FFF2-40B4-BE49-F238E27FC236}">
-                <a16:creationId xmlns:a16="http://schemas.microsoft.com/office/drawing/2014/main" id="{314370B2-513C-4266-9DAF-0D1FF52FC906}"/>
+                <a16:creationId xmlns:a16="http://schemas.microsoft.com/office/drawing/2014/main" id="{A190D413-471D-4446-B739-2B98A548532B}"/>
               </a:ext>
             </a:extLst>
           </p:cNvPr>
@@ -1577,7 +1577,7 @@
           <p:cNvPr id="2" name="Body">
             <a:extLst xmlns:a="http://schemas.openxmlformats.org/drawingml/2006/main">
               <a:ext uri="{FF2B5EF4-FFF2-40B4-BE49-F238E27FC236}">
-                <a16:creationId xmlns:a16="http://schemas.microsoft.com/office/drawing/2014/main" id="{FB1778B6-C6E6-469F-BB4F-65921321AD22}"/>
+                <a16:creationId xmlns:a16="http://schemas.microsoft.com/office/drawing/2014/main" id="{3E1BFD58-347D-4BE4-85C0-65EA08E391E7}"/>
               </a:ext>
             </a:extLst>
           </p:cNvPr>
@@ -1751,7 +1751,7 @@
           <p:cNvPr id="4" name="Title">
             <a:extLst xmlns:a="http://schemas.openxmlformats.org/drawingml/2006/main">
               <a:ext uri="{FF2B5EF4-FFF2-40B4-BE49-F238E27FC236}">
-                <a16:creationId xmlns:a16="http://schemas.microsoft.com/office/drawing/2014/main" id="{D670837F-B5A2-4742-A0D6-B4D81FAA9175}"/>
+                <a16:creationId xmlns:a16="http://schemas.microsoft.com/office/drawing/2014/main" id="{A66AC618-BED0-4E11-94A1-729D7A447775}"/>
               </a:ext>
             </a:extLst>
           </p:cNvPr>
@@ -1908,7 +1908,7 @@
           <p:cNvPr id="2" name="Left column">
             <a:extLst xmlns:a="http://schemas.openxmlformats.org/drawingml/2006/main">
               <a:ext uri="{FF2B5EF4-FFF2-40B4-BE49-F238E27FC236}">
-                <a16:creationId xmlns:a16="http://schemas.microsoft.com/office/drawing/2014/main" id="{24A2CED7-8DD7-4E29-AEC4-C978068634A1}"/>
+                <a16:creationId xmlns:a16="http://schemas.microsoft.com/office/drawing/2014/main" id="{1443A70B-8EBB-4BDF-8CCA-D0595ED83172}"/>
               </a:ext>
             </a:extLst>
           </p:cNvPr>
@@ -2065,7 +2065,7 @@
           <p:cNvPr id="3" name="Right column">
             <a:extLst xmlns:a="http://schemas.openxmlformats.org/drawingml/2006/main">
               <a:ext uri="{FF2B5EF4-FFF2-40B4-BE49-F238E27FC236}">
-                <a16:creationId xmlns:a16="http://schemas.microsoft.com/office/drawing/2014/main" id="{89CC41F6-19E3-4807-9137-A3B1D1CF2024}"/>
+                <a16:creationId xmlns:a16="http://schemas.microsoft.com/office/drawing/2014/main" id="{93825E3C-3CD1-4BC1-8192-0C5342618089}"/>
               </a:ext>
             </a:extLst>
           </p:cNvPr>
@@ -2239,7 +2239,7 @@
           <p:cNvPr id="3" name="Title">
             <a:extLst xmlns:a="http://schemas.openxmlformats.org/drawingml/2006/main">
               <a:ext uri="{FF2B5EF4-FFF2-40B4-BE49-F238E27FC236}">
-                <a16:creationId xmlns:a16="http://schemas.microsoft.com/office/drawing/2014/main" id="{80DD0F24-3007-4E0A-A027-8BC4070CD49E}"/>
+                <a16:creationId xmlns:a16="http://schemas.microsoft.com/office/drawing/2014/main" id="{1DAA7BB4-FDAA-4DD2-ABB0-DA3B111E0617}"/>
               </a:ext>
             </a:extLst>
           </p:cNvPr>
@@ -2396,7 +2396,7 @@
           <p:cNvPr id="2" name="Left column">
             <a:extLst xmlns:a="http://schemas.openxmlformats.org/drawingml/2006/main">
               <a:ext uri="{FF2B5EF4-FFF2-40B4-BE49-F238E27FC236}">
-                <a16:creationId xmlns:a16="http://schemas.microsoft.com/office/drawing/2014/main" id="{D7B6D2F3-9FA9-4817-BCE5-99872FD765F4}"/>
+                <a16:creationId xmlns:a16="http://schemas.microsoft.com/office/drawing/2014/main" id="{C3E5B46A-1FC3-4CD1-B4AF-DE8E0892FF94}"/>
               </a:ext>
             </a:extLst>
           </p:cNvPr>
@@ -2591,12 +2591,12 @@
   </p:cSld>
   <p:clrMap bg1="lt1" tx1="dk1" bg2="lt2" tx2="dk2" accent1="accent1" accent2="accent2" accent3="accent3" accent4="accent4" accent5="accent5" accent6="accent6" hlink="hlink" folHlink="folHlink"/>
   <p:sldLayoutIdLst>
-    <p:sldLayoutId xmlns:r="http://schemas.openxmlformats.org/officeDocument/2006/relationships" id="2147483649" r:id="R680d548596894fdb"/>
-    <p:sldLayoutId xmlns:r="http://schemas.openxmlformats.org/officeDocument/2006/relationships" id="2147483650" r:id="R9b6da22b9c714ded"/>
-    <p:sldLayoutId xmlns:r="http://schemas.openxmlformats.org/officeDocument/2006/relationships" id="2147483651" r:id="Rcb6731cbd4f44479"/>
-    <p:sldLayoutId xmlns:r="http://schemas.openxmlformats.org/officeDocument/2006/relationships" id="2147483652" r:id="R2d3e16939af048e1"/>
-    <p:sldLayoutId xmlns:r="http://schemas.openxmlformats.org/officeDocument/2006/relationships" id="2147483653" r:id="R40ec77f61ad2418b"/>
-    <p:sldLayoutId xmlns:r="http://schemas.openxmlformats.org/officeDocument/2006/relationships" id="2147483654" r:id="R78472b68426c4500"/>
+    <p:sldLayoutId xmlns:r="http://schemas.openxmlformats.org/officeDocument/2006/relationships" id="2147483649" r:id="R35422f54f43e483f"/>
+    <p:sldLayoutId xmlns:r="http://schemas.openxmlformats.org/officeDocument/2006/relationships" id="2147483650" r:id="R57b6acfa96aa4fbf"/>
+    <p:sldLayoutId xmlns:r="http://schemas.openxmlformats.org/officeDocument/2006/relationships" id="2147483651" r:id="Rbe5992493a32464b"/>
+    <p:sldLayoutId xmlns:r="http://schemas.openxmlformats.org/officeDocument/2006/relationships" id="2147483652" r:id="R33ecfd4a8f134a8d"/>
+    <p:sldLayoutId xmlns:r="http://schemas.openxmlformats.org/officeDocument/2006/relationships" id="2147483653" r:id="R7308e6a6a0934963"/>
+    <p:sldLayoutId xmlns:r="http://schemas.openxmlformats.org/officeDocument/2006/relationships" id="2147483654" r:id="R9f673edcaa8548a1"/>
   </p:sldLayoutIdLst>
   <p:txStyles>
     <p:titleStyle>
@@ -3140,7 +3140,7 @@
           <p:cNvPr id="2" name="">
             <a:extLst xmlns:a="http://schemas.openxmlformats.org/drawingml/2006/main">
               <a:ext uri="{FF2B5EF4-FFF2-40B4-BE49-F238E27FC236}">
-                <a16:creationId xmlns:a16="http://schemas.microsoft.com/office/drawing/2014/main" id="{1FE3799C-ED32-426D-9857-18C85440DC6B}"/>
+                <a16:creationId xmlns:a16="http://schemas.microsoft.com/office/drawing/2014/main" id="{88FD7B83-C824-4E54-94D2-843937892DB7}"/>
               </a:ext>
             </a:extLst>
           </p:cNvPr>
@@ -3150,7 +3150,7 @@
           <p:nvPr/>
         </p:nvPicPr>
         <p:blipFill>
-          <a:blip xmlns:r="http://schemas.openxmlformats.org/officeDocument/2006/relationships" xmlns:a="http://schemas.openxmlformats.org/drawingml/2006/main" r:embed="R32798cf37d7348c3"/>
+          <a:blip xmlns:r="http://schemas.openxmlformats.org/officeDocument/2006/relationships" xmlns:a="http://schemas.openxmlformats.org/drawingml/2006/main" r:embed="R470ee1cc12b54297"/>
           <a:srcRect xmlns:a="http://schemas.openxmlformats.org/drawingml/2006/main" l="0" t="0" r="0" b="0"/>
           <a:stretch xmlns:a="http://schemas.openxmlformats.org/drawingml/2006/main">
             <a:fillRect l="0" t="0" r="0" b="0"/>
@@ -3169,7 +3169,7 @@
     </p:spTree>
     <p:extLst>
       <p:ext uri="{BB962C8B-B14F-4D97-AF65-F5344CB8AC3E}">
-        <p14:creationId xmlns:p14="http://schemas.microsoft.com/office/powerpoint/2010/main" val="1033457904"/>
+        <p14:creationId xmlns:p14="http://schemas.microsoft.com/office/powerpoint/2010/main" val="1024928985"/>
       </p:ext>
     </p:extLst>
   </p:cSld>
@@ -3193,7 +3193,7 @@
           <p:cNvPr id="2" name="">
             <a:extLst xmlns:a="http://schemas.openxmlformats.org/drawingml/2006/main">
               <a:ext uri="{FF2B5EF4-FFF2-40B4-BE49-F238E27FC236}">
-                <a16:creationId xmlns:a16="http://schemas.microsoft.com/office/drawing/2014/main" id="{F28470DE-2443-4A1D-8181-A18DA79C7A9B}"/>
+                <a16:creationId xmlns:a16="http://schemas.microsoft.com/office/drawing/2014/main" id="{0F34ED52-83BD-42CD-8701-4AF141B86579}"/>
               </a:ext>
             </a:extLst>
           </p:cNvPr>
@@ -3203,7 +3203,7 @@
           <p:nvPr/>
         </p:nvPicPr>
         <p:blipFill>
-          <a:blip xmlns:r="http://schemas.openxmlformats.org/officeDocument/2006/relationships" xmlns:a="http://schemas.openxmlformats.org/drawingml/2006/main" r:embed="R26965394ad744349"/>
+          <a:blip xmlns:r="http://schemas.openxmlformats.org/officeDocument/2006/relationships" xmlns:a="http://schemas.openxmlformats.org/drawingml/2006/main" r:embed="R23974183deba4c0f"/>
           <a:srcRect xmlns:a="http://schemas.openxmlformats.org/drawingml/2006/main" l="0" t="0" r="0" b="0"/>
           <a:stretch xmlns:a="http://schemas.openxmlformats.org/drawingml/2006/main">
             <a:fillRect l="0" t="0" r="0" b="0"/>
@@ -3222,7 +3222,7 @@
     </p:spTree>
     <p:extLst>
       <p:ext uri="{BB962C8B-B14F-4D97-AF65-F5344CB8AC3E}">
-        <p14:creationId xmlns:p14="http://schemas.microsoft.com/office/powerpoint/2010/main" val="1860389566"/>
+        <p14:creationId xmlns:p14="http://schemas.microsoft.com/office/powerpoint/2010/main" val="1294197537"/>
       </p:ext>
     </p:extLst>
   </p:cSld>
@@ -3246,7 +3246,7 @@
           <p:cNvPr id="2" name="">
             <a:extLst xmlns:a="http://schemas.openxmlformats.org/drawingml/2006/main">
               <a:ext uri="{FF2B5EF4-FFF2-40B4-BE49-F238E27FC236}">
-                <a16:creationId xmlns:a16="http://schemas.microsoft.com/office/drawing/2014/main" id="{8CD7BE0D-5C55-466A-9DB8-410093073B95}"/>
+                <a16:creationId xmlns:a16="http://schemas.microsoft.com/office/drawing/2014/main" id="{FA983D2F-0F37-424F-A0F8-876B84C0B071}"/>
               </a:ext>
             </a:extLst>
           </p:cNvPr>
@@ -3256,7 +3256,7 @@
           <p:nvPr/>
         </p:nvPicPr>
         <p:blipFill>
-          <a:blip xmlns:r="http://schemas.openxmlformats.org/officeDocument/2006/relationships" xmlns:a="http://schemas.openxmlformats.org/drawingml/2006/main" r:embed="R3f8fff615df24d27"/>
+          <a:blip xmlns:r="http://schemas.openxmlformats.org/officeDocument/2006/relationships" xmlns:a="http://schemas.openxmlformats.org/drawingml/2006/main" r:embed="R9f0831108a40451a"/>
           <a:srcRect xmlns:a="http://schemas.openxmlformats.org/drawingml/2006/main" l="0" t="0" r="0" b="0"/>
           <a:stretch xmlns:a="http://schemas.openxmlformats.org/drawingml/2006/main">
             <a:fillRect l="0" t="0" r="0" b="0"/>
@@ -3275,7 +3275,7 @@
     </p:spTree>
     <p:extLst>
       <p:ext uri="{BB962C8B-B14F-4D97-AF65-F5344CB8AC3E}">
-        <p14:creationId xmlns:p14="http://schemas.microsoft.com/office/powerpoint/2010/main" val="740435454"/>
+        <p14:creationId xmlns:p14="http://schemas.microsoft.com/office/powerpoint/2010/main" val="1287186040"/>
       </p:ext>
     </p:extLst>
   </p:cSld>
@@ -3299,7 +3299,7 @@
           <p:cNvPr id="2" name="">
             <a:extLst xmlns:a="http://schemas.openxmlformats.org/drawingml/2006/main">
               <a:ext uri="{FF2B5EF4-FFF2-40B4-BE49-F238E27FC236}">
-                <a16:creationId xmlns:a16="http://schemas.microsoft.com/office/drawing/2014/main" id="{16C2A885-FE35-4EE2-9857-1EE8E3AC7406}"/>
+                <a16:creationId xmlns:a16="http://schemas.microsoft.com/office/drawing/2014/main" id="{1BF63832-684E-46D7-A43B-A3D37B042E15}"/>
               </a:ext>
             </a:extLst>
           </p:cNvPr>
@@ -3309,7 +3309,7 @@
           <p:nvPr/>
         </p:nvPicPr>
         <p:blipFill>
-          <a:blip xmlns:r="http://schemas.openxmlformats.org/officeDocument/2006/relationships" xmlns:a="http://schemas.openxmlformats.org/drawingml/2006/main" r:embed="R26dbfedf3b9c40c5"/>
+          <a:blip xmlns:r="http://schemas.openxmlformats.org/officeDocument/2006/relationships" xmlns:a="http://schemas.openxmlformats.org/drawingml/2006/main" r:embed="R35414526773d445c"/>
           <a:srcRect xmlns:a="http://schemas.openxmlformats.org/drawingml/2006/main" l="0" t="0" r="0" b="0"/>
           <a:stretch xmlns:a="http://schemas.openxmlformats.org/drawingml/2006/main">
             <a:fillRect l="0" t="0" r="0" b="0"/>
@@ -3328,7 +3328,7 @@
     </p:spTree>
     <p:extLst>
       <p:ext uri="{BB962C8B-B14F-4D97-AF65-F5344CB8AC3E}">
-        <p14:creationId xmlns:p14="http://schemas.microsoft.com/office/powerpoint/2010/main" val="1973005933"/>
+        <p14:creationId xmlns:p14="http://schemas.microsoft.com/office/powerpoint/2010/main" val="982741621"/>
       </p:ext>
     </p:extLst>
   </p:cSld>
@@ -3352,7 +3352,7 @@
           <p:cNvPr id="2" name="">
             <a:extLst xmlns:a="http://schemas.openxmlformats.org/drawingml/2006/main">
               <a:ext uri="{FF2B5EF4-FFF2-40B4-BE49-F238E27FC236}">
-                <a16:creationId xmlns:a16="http://schemas.microsoft.com/office/drawing/2014/main" id="{07D5EA08-3BC2-4B03-837D-9FE8CDCACE6D}"/>
+                <a16:creationId xmlns:a16="http://schemas.microsoft.com/office/drawing/2014/main" id="{9683581A-185F-4DFF-A116-7EF9800609C9}"/>
               </a:ext>
             </a:extLst>
           </p:cNvPr>
@@ -3362,7 +3362,7 @@
           <p:nvPr/>
         </p:nvPicPr>
         <p:blipFill>
-          <a:blip xmlns:r="http://schemas.openxmlformats.org/officeDocument/2006/relationships" xmlns:a="http://schemas.openxmlformats.org/drawingml/2006/main" r:embed="Rc24d40a4f1b54f66"/>
+          <a:blip xmlns:r="http://schemas.openxmlformats.org/officeDocument/2006/relationships" xmlns:a="http://schemas.openxmlformats.org/drawingml/2006/main" r:embed="R457d49128f234d80"/>
           <a:srcRect xmlns:a="http://schemas.openxmlformats.org/drawingml/2006/main" l="0" t="0" r="0" b="0"/>
           <a:stretch xmlns:a="http://schemas.openxmlformats.org/drawingml/2006/main">
             <a:fillRect l="0" t="0" r="0" b="0"/>
@@ -3381,7 +3381,7 @@
     </p:spTree>
     <p:extLst>
       <p:ext uri="{BB962C8B-B14F-4D97-AF65-F5344CB8AC3E}">
-        <p14:creationId xmlns:p14="http://schemas.microsoft.com/office/powerpoint/2010/main" val="672952546"/>
+        <p14:creationId xmlns:p14="http://schemas.microsoft.com/office/powerpoint/2010/main" val="1746829883"/>
       </p:ext>
     </p:extLst>
   </p:cSld>
@@ -3405,7 +3405,7 @@
           <p:cNvPr id="2" name="">
             <a:extLst xmlns:a="http://schemas.openxmlformats.org/drawingml/2006/main">
               <a:ext uri="{FF2B5EF4-FFF2-40B4-BE49-F238E27FC236}">
-                <a16:creationId xmlns:a16="http://schemas.microsoft.com/office/drawing/2014/main" id="{F65F9D0C-3BC6-42C7-BA53-2F63E411FED5}"/>
+                <a16:creationId xmlns:a16="http://schemas.microsoft.com/office/drawing/2014/main" id="{EB3764CC-9DDD-43BE-8B8B-F7BEEF9B4584}"/>
               </a:ext>
             </a:extLst>
           </p:cNvPr>
@@ -3415,7 +3415,7 @@
           <p:nvPr/>
         </p:nvPicPr>
         <p:blipFill>
-          <a:blip xmlns:r="http://schemas.openxmlformats.org/officeDocument/2006/relationships" xmlns:a="http://schemas.openxmlformats.org/drawingml/2006/main" r:embed="Redcd2f9751714d39"/>
+          <a:blip xmlns:r="http://schemas.openxmlformats.org/officeDocument/2006/relationships" xmlns:a="http://schemas.openxmlformats.org/drawingml/2006/main" r:embed="Rf877bbba30874b33"/>
           <a:srcRect xmlns:a="http://schemas.openxmlformats.org/drawingml/2006/main" l="0" t="0" r="0" b="0"/>
           <a:stretch xmlns:a="http://schemas.openxmlformats.org/drawingml/2006/main">
             <a:fillRect l="0" t="0" r="0" b="0"/>
@@ -3434,7 +3434,7 @@
     </p:spTree>
     <p:extLst>
       <p:ext uri="{BB962C8B-B14F-4D97-AF65-F5344CB8AC3E}">
-        <p14:creationId xmlns:p14="http://schemas.microsoft.com/office/powerpoint/2010/main" val="714332397"/>
+        <p14:creationId xmlns:p14="http://schemas.microsoft.com/office/powerpoint/2010/main" val="1141265964"/>
       </p:ext>
     </p:extLst>
   </p:cSld>
@@ -3458,7 +3458,7 @@
           <p:cNvPr id="2" name="">
             <a:extLst xmlns:a="http://schemas.openxmlformats.org/drawingml/2006/main">
               <a:ext uri="{FF2B5EF4-FFF2-40B4-BE49-F238E27FC236}">
-                <a16:creationId xmlns:a16="http://schemas.microsoft.com/office/drawing/2014/main" id="{F403AE0C-80B8-44CD-BE8D-78E8CF678FF5}"/>
+                <a16:creationId xmlns:a16="http://schemas.microsoft.com/office/drawing/2014/main" id="{B1929098-F71C-48B8-9A54-453FBEE2E1ED}"/>
               </a:ext>
             </a:extLst>
           </p:cNvPr>
@@ -3468,7 +3468,7 @@
           <p:nvPr/>
         </p:nvPicPr>
         <p:blipFill>
-          <a:blip xmlns:r="http://schemas.openxmlformats.org/officeDocument/2006/relationships" xmlns:a="http://schemas.openxmlformats.org/drawingml/2006/main" r:embed="R7f9b867749be4469"/>
+          <a:blip xmlns:r="http://schemas.openxmlformats.org/officeDocument/2006/relationships" xmlns:a="http://schemas.openxmlformats.org/drawingml/2006/main" r:embed="R04d88d19257f45c3"/>
           <a:srcRect xmlns:a="http://schemas.openxmlformats.org/drawingml/2006/main" l="0" t="0" r="0" b="0"/>
           <a:stretch xmlns:a="http://schemas.openxmlformats.org/drawingml/2006/main">
             <a:fillRect l="0" t="0" r="0" b="0"/>
@@ -3487,7 +3487,7 @@
     </p:spTree>
     <p:extLst>
       <p:ext uri="{BB962C8B-B14F-4D97-AF65-F5344CB8AC3E}">
-        <p14:creationId xmlns:p14="http://schemas.microsoft.com/office/powerpoint/2010/main" val="578485569"/>
+        <p14:creationId xmlns:p14="http://schemas.microsoft.com/office/powerpoint/2010/main" val="1119226332"/>
       </p:ext>
     </p:extLst>
   </p:cSld>

--- a/newdoc/1007推进文档/1007项目进度总览_数据训练与MCP_7页.pptx
+++ b/newdoc/1007推进文档/1007项目进度总览_数据训练与MCP_7页.pptx
@@ -2,19 +2,19 @@
 <file path=ppt/presentation.xml><?xml version="1.0" encoding="utf-8"?>
 <p:presentation xmlns:p="http://schemas.openxmlformats.org/presentationml/2006/main">
   <p:sldMasterIdLst>
-    <p:sldMasterId xmlns:r="http://schemas.openxmlformats.org/officeDocument/2006/relationships" id="2147483648" r:id="R525df94f503b4d9f"/>
+    <p:sldMasterId xmlns:r="http://schemas.openxmlformats.org/officeDocument/2006/relationships" id="2147483648" r:id="R965e778c9c5d4ba3"/>
   </p:sldMasterIdLst>
   <p:notesMasterIdLst>
-    <p:notesMasterId xmlns:r="http://schemas.openxmlformats.org/officeDocument/2006/relationships" r:id="R87109a7101f445d2"/>
+    <p:notesMasterId xmlns:r="http://schemas.openxmlformats.org/officeDocument/2006/relationships" r:id="Rcf3774c978754d9d"/>
   </p:notesMasterIdLst>
   <p:sldIdLst>
-    <p:sldId xmlns:r="http://schemas.openxmlformats.org/officeDocument/2006/relationships" id="256" r:id="R293e0323a15a433e"/>
-    <p:sldId xmlns:r="http://schemas.openxmlformats.org/officeDocument/2006/relationships" id="257" r:id="R8b571658c0c246b7"/>
-    <p:sldId xmlns:r="http://schemas.openxmlformats.org/officeDocument/2006/relationships" id="258" r:id="R11bc65d4ce794914"/>
-    <p:sldId xmlns:r="http://schemas.openxmlformats.org/officeDocument/2006/relationships" id="259" r:id="Rfe4d36ea7ca74900"/>
-    <p:sldId xmlns:r="http://schemas.openxmlformats.org/officeDocument/2006/relationships" id="260" r:id="Rb9322f5083214ec5"/>
-    <p:sldId xmlns:r="http://schemas.openxmlformats.org/officeDocument/2006/relationships" id="261" r:id="Rf04848f5a9014cc9"/>
-    <p:sldId xmlns:r="http://schemas.openxmlformats.org/officeDocument/2006/relationships" id="262" r:id="Ra6d4ba9b09eb4d15"/>
+    <p:sldId xmlns:r="http://schemas.openxmlformats.org/officeDocument/2006/relationships" id="256" r:id="R8fc66f41ea794758"/>
+    <p:sldId xmlns:r="http://schemas.openxmlformats.org/officeDocument/2006/relationships" id="257" r:id="R7927f05a9dc440d5"/>
+    <p:sldId xmlns:r="http://schemas.openxmlformats.org/officeDocument/2006/relationships" id="258" r:id="R2bb57e82908b4976"/>
+    <p:sldId xmlns:r="http://schemas.openxmlformats.org/officeDocument/2006/relationships" id="259" r:id="R728da1f75c03421b"/>
+    <p:sldId xmlns:r="http://schemas.openxmlformats.org/officeDocument/2006/relationships" id="260" r:id="R5be2f2116ebc4be8"/>
+    <p:sldId xmlns:r="http://schemas.openxmlformats.org/officeDocument/2006/relationships" id="261" r:id="R43b5d0b190524f80"/>
+    <p:sldId xmlns:r="http://schemas.openxmlformats.org/officeDocument/2006/relationships" id="262" r:id="Rb77b170af4eb49b6"/>
   </p:sldIdLst>
   <p:sldSz cx="12192000" cy="6858000"/>
   <p:notesSz cx="6858000" cy="9144000"/>
@@ -518,7 +518,7 @@
           <a:lstStyle xmlns:a="http://schemas.openxmlformats.org/drawingml/2006/main"/>
           <a:p xmlns:a="http://schemas.openxmlformats.org/drawingml/2006/main">
             <a:r>
-              <a:t>来源：newdoc/1004推进文档/01、02、03、07，newdoc/1007推进文档/03。</a:t>
+              <a:t>来源：newdoc/1004推进文档/01、02、03、07（A×B×C 交互）；04、05（1000 批：尝试 1268、入库 1000、候选池 994、决策轮 5618）；newdoc/1007推进文档/03。</a:t>
             </a:r>
           </a:p>
         </p:txBody>
@@ -915,7 +915,7 @@
           <p:cNvPr id="3" name="Title">
             <a:extLst xmlns:a="http://schemas.openxmlformats.org/drawingml/2006/main">
               <a:ext uri="{FF2B5EF4-FFF2-40B4-BE49-F238E27FC236}">
-                <a16:creationId xmlns:a16="http://schemas.microsoft.com/office/drawing/2014/main" id="{CD8C7ADF-FFA9-4B78-8201-F19B8C4F4486}"/>
+                <a16:creationId xmlns:a16="http://schemas.microsoft.com/office/drawing/2014/main" id="{8106EFFE-5C63-4568-B79A-B9B1EEDD071C}"/>
               </a:ext>
             </a:extLst>
           </p:cNvPr>
@@ -1072,7 +1072,7 @@
           <p:cNvPr id="2" name="Subtitle">
             <a:extLst xmlns:a="http://schemas.openxmlformats.org/drawingml/2006/main">
               <a:ext uri="{FF2B5EF4-FFF2-40B4-BE49-F238E27FC236}">
-                <a16:creationId xmlns:a16="http://schemas.microsoft.com/office/drawing/2014/main" id="{31157F31-BE6F-4A98-844E-875E82588014}"/>
+                <a16:creationId xmlns:a16="http://schemas.microsoft.com/office/drawing/2014/main" id="{1480F1EC-77E6-4761-8A09-955D00C9B060}"/>
               </a:ext>
             </a:extLst>
           </p:cNvPr>
@@ -1246,7 +1246,7 @@
           <p:cNvPr id="2" name="Section title">
             <a:extLst xmlns:a="http://schemas.openxmlformats.org/drawingml/2006/main">
               <a:ext uri="{FF2B5EF4-FFF2-40B4-BE49-F238E27FC236}">
-                <a16:creationId xmlns:a16="http://schemas.microsoft.com/office/drawing/2014/main" id="{BBF4CA35-D7E8-4521-8ED7-0A081ADD0AA9}"/>
+                <a16:creationId xmlns:a16="http://schemas.microsoft.com/office/drawing/2014/main" id="{3F16954B-9058-4D6F-967C-FF139E8C0914}"/>
               </a:ext>
             </a:extLst>
           </p:cNvPr>
@@ -1420,7 +1420,7 @@
           <p:cNvPr id="3" name="Title">
             <a:extLst xmlns:a="http://schemas.openxmlformats.org/drawingml/2006/main">
               <a:ext uri="{FF2B5EF4-FFF2-40B4-BE49-F238E27FC236}">
-                <a16:creationId xmlns:a16="http://schemas.microsoft.com/office/drawing/2014/main" id="{A190D413-471D-4446-B739-2B98A548532B}"/>
+                <a16:creationId xmlns:a16="http://schemas.microsoft.com/office/drawing/2014/main" id="{7E1053D5-70B4-4FB1-A3AD-839CE05E8A4F}"/>
               </a:ext>
             </a:extLst>
           </p:cNvPr>
@@ -1577,7 +1577,7 @@
           <p:cNvPr id="2" name="Body">
             <a:extLst xmlns:a="http://schemas.openxmlformats.org/drawingml/2006/main">
               <a:ext uri="{FF2B5EF4-FFF2-40B4-BE49-F238E27FC236}">
-                <a16:creationId xmlns:a16="http://schemas.microsoft.com/office/drawing/2014/main" id="{3E1BFD58-347D-4BE4-85C0-65EA08E391E7}"/>
+                <a16:creationId xmlns:a16="http://schemas.microsoft.com/office/drawing/2014/main" id="{2C81FF18-FB22-444A-B151-3FF99DC99BF9}"/>
               </a:ext>
             </a:extLst>
           </p:cNvPr>
@@ -1751,7 +1751,7 @@
           <p:cNvPr id="4" name="Title">
             <a:extLst xmlns:a="http://schemas.openxmlformats.org/drawingml/2006/main">
               <a:ext uri="{FF2B5EF4-FFF2-40B4-BE49-F238E27FC236}">
-                <a16:creationId xmlns:a16="http://schemas.microsoft.com/office/drawing/2014/main" id="{A66AC618-BED0-4E11-94A1-729D7A447775}"/>
+                <a16:creationId xmlns:a16="http://schemas.microsoft.com/office/drawing/2014/main" id="{5D1BB700-8AF0-420F-8213-67F79F61F6AC}"/>
               </a:ext>
             </a:extLst>
           </p:cNvPr>
@@ -1908,7 +1908,7 @@
           <p:cNvPr id="2" name="Left column">
             <a:extLst xmlns:a="http://schemas.openxmlformats.org/drawingml/2006/main">
               <a:ext uri="{FF2B5EF4-FFF2-40B4-BE49-F238E27FC236}">
-                <a16:creationId xmlns:a16="http://schemas.microsoft.com/office/drawing/2014/main" id="{1443A70B-8EBB-4BDF-8CCA-D0595ED83172}"/>
+                <a16:creationId xmlns:a16="http://schemas.microsoft.com/office/drawing/2014/main" id="{2B5291AD-5110-46D4-AECB-E2969A25C63F}"/>
               </a:ext>
             </a:extLst>
           </p:cNvPr>
@@ -2065,7 +2065,7 @@
           <p:cNvPr id="3" name="Right column">
             <a:extLst xmlns:a="http://schemas.openxmlformats.org/drawingml/2006/main">
               <a:ext uri="{FF2B5EF4-FFF2-40B4-BE49-F238E27FC236}">
-                <a16:creationId xmlns:a16="http://schemas.microsoft.com/office/drawing/2014/main" id="{93825E3C-3CD1-4BC1-8192-0C5342618089}"/>
+                <a16:creationId xmlns:a16="http://schemas.microsoft.com/office/drawing/2014/main" id="{70EAAAAA-0C8E-4378-81A3-96C19602204E}"/>
               </a:ext>
             </a:extLst>
           </p:cNvPr>
@@ -2239,7 +2239,7 @@
           <p:cNvPr id="3" name="Title">
             <a:extLst xmlns:a="http://schemas.openxmlformats.org/drawingml/2006/main">
               <a:ext uri="{FF2B5EF4-FFF2-40B4-BE49-F238E27FC236}">
-                <a16:creationId xmlns:a16="http://schemas.microsoft.com/office/drawing/2014/main" id="{1DAA7BB4-FDAA-4DD2-ABB0-DA3B111E0617}"/>
+                <a16:creationId xmlns:a16="http://schemas.microsoft.com/office/drawing/2014/main" id="{A75E487C-1A5F-4748-8613-2B553691D613}"/>
               </a:ext>
             </a:extLst>
           </p:cNvPr>
@@ -2396,7 +2396,7 @@
           <p:cNvPr id="2" name="Left column">
             <a:extLst xmlns:a="http://schemas.openxmlformats.org/drawingml/2006/main">
               <a:ext uri="{FF2B5EF4-FFF2-40B4-BE49-F238E27FC236}">
-                <a16:creationId xmlns:a16="http://schemas.microsoft.com/office/drawing/2014/main" id="{C3E5B46A-1FC3-4CD1-B4AF-DE8E0892FF94}"/>
+                <a16:creationId xmlns:a16="http://schemas.microsoft.com/office/drawing/2014/main" id="{8753C0A2-239E-46C0-8D79-72EE833E81D7}"/>
               </a:ext>
             </a:extLst>
           </p:cNvPr>
@@ -2591,12 +2591,12 @@
   </p:cSld>
   <p:clrMap bg1="lt1" tx1="dk1" bg2="lt2" tx2="dk2" accent1="accent1" accent2="accent2" accent3="accent3" accent4="accent4" accent5="accent5" accent6="accent6" hlink="hlink" folHlink="folHlink"/>
   <p:sldLayoutIdLst>
-    <p:sldLayoutId xmlns:r="http://schemas.openxmlformats.org/officeDocument/2006/relationships" id="2147483649" r:id="R35422f54f43e483f"/>
-    <p:sldLayoutId xmlns:r="http://schemas.openxmlformats.org/officeDocument/2006/relationships" id="2147483650" r:id="R57b6acfa96aa4fbf"/>
-    <p:sldLayoutId xmlns:r="http://schemas.openxmlformats.org/officeDocument/2006/relationships" id="2147483651" r:id="Rbe5992493a32464b"/>
-    <p:sldLayoutId xmlns:r="http://schemas.openxmlformats.org/officeDocument/2006/relationships" id="2147483652" r:id="R33ecfd4a8f134a8d"/>
-    <p:sldLayoutId xmlns:r="http://schemas.openxmlformats.org/officeDocument/2006/relationships" id="2147483653" r:id="R7308e6a6a0934963"/>
-    <p:sldLayoutId xmlns:r="http://schemas.openxmlformats.org/officeDocument/2006/relationships" id="2147483654" r:id="R9f673edcaa8548a1"/>
+    <p:sldLayoutId xmlns:r="http://schemas.openxmlformats.org/officeDocument/2006/relationships" id="2147483649" r:id="R11c483b9630c421d"/>
+    <p:sldLayoutId xmlns:r="http://schemas.openxmlformats.org/officeDocument/2006/relationships" id="2147483650" r:id="R63944e985cc74245"/>
+    <p:sldLayoutId xmlns:r="http://schemas.openxmlformats.org/officeDocument/2006/relationships" id="2147483651" r:id="R172815af252c4def"/>
+    <p:sldLayoutId xmlns:r="http://schemas.openxmlformats.org/officeDocument/2006/relationships" id="2147483652" r:id="Rebbcd7882bb146f7"/>
+    <p:sldLayoutId xmlns:r="http://schemas.openxmlformats.org/officeDocument/2006/relationships" id="2147483653" r:id="Ra795c0ddc46741ef"/>
+    <p:sldLayoutId xmlns:r="http://schemas.openxmlformats.org/officeDocument/2006/relationships" id="2147483654" r:id="Rfff4162a182f4d7f"/>
   </p:sldLayoutIdLst>
   <p:txStyles>
     <p:titleStyle>
@@ -3140,7 +3140,7 @@
           <p:cNvPr id="2" name="">
             <a:extLst xmlns:a="http://schemas.openxmlformats.org/drawingml/2006/main">
               <a:ext uri="{FF2B5EF4-FFF2-40B4-BE49-F238E27FC236}">
-                <a16:creationId xmlns:a16="http://schemas.microsoft.com/office/drawing/2014/main" id="{88FD7B83-C824-4E54-94D2-843937892DB7}"/>
+                <a16:creationId xmlns:a16="http://schemas.microsoft.com/office/drawing/2014/main" id="{3F1D3B34-36C2-45F1-B2AB-7511BA8EFA84}"/>
               </a:ext>
             </a:extLst>
           </p:cNvPr>
@@ -3150,7 +3150,7 @@
           <p:nvPr/>
         </p:nvPicPr>
         <p:blipFill>
-          <a:blip xmlns:r="http://schemas.openxmlformats.org/officeDocument/2006/relationships" xmlns:a="http://schemas.openxmlformats.org/drawingml/2006/main" r:embed="R470ee1cc12b54297"/>
+          <a:blip xmlns:r="http://schemas.openxmlformats.org/officeDocument/2006/relationships" xmlns:a="http://schemas.openxmlformats.org/drawingml/2006/main" r:embed="R5e9abedf179742e6"/>
           <a:srcRect xmlns:a="http://schemas.openxmlformats.org/drawingml/2006/main" l="0" t="0" r="0" b="0"/>
           <a:stretch xmlns:a="http://schemas.openxmlformats.org/drawingml/2006/main">
             <a:fillRect l="0" t="0" r="0" b="0"/>
@@ -3169,7 +3169,7 @@
     </p:spTree>
     <p:extLst>
       <p:ext uri="{BB962C8B-B14F-4D97-AF65-F5344CB8AC3E}">
-        <p14:creationId xmlns:p14="http://schemas.microsoft.com/office/powerpoint/2010/main" val="1024928985"/>
+        <p14:creationId xmlns:p14="http://schemas.microsoft.com/office/powerpoint/2010/main" val="2030548422"/>
       </p:ext>
     </p:extLst>
   </p:cSld>
@@ -3193,7 +3193,7 @@
           <p:cNvPr id="2" name="">
             <a:extLst xmlns:a="http://schemas.openxmlformats.org/drawingml/2006/main">
               <a:ext uri="{FF2B5EF4-FFF2-40B4-BE49-F238E27FC236}">
-                <a16:creationId xmlns:a16="http://schemas.microsoft.com/office/drawing/2014/main" id="{0F34ED52-83BD-42CD-8701-4AF141B86579}"/>
+                <a16:creationId xmlns:a16="http://schemas.microsoft.com/office/drawing/2014/main" id="{7ABD9FFA-0C2E-4417-9717-CF8BB0C6616A}"/>
               </a:ext>
             </a:extLst>
           </p:cNvPr>
@@ -3203,7 +3203,7 @@
           <p:nvPr/>
         </p:nvPicPr>
         <p:blipFill>
-          <a:blip xmlns:r="http://schemas.openxmlformats.org/officeDocument/2006/relationships" xmlns:a="http://schemas.openxmlformats.org/drawingml/2006/main" r:embed="R23974183deba4c0f"/>
+          <a:blip xmlns:r="http://schemas.openxmlformats.org/officeDocument/2006/relationships" xmlns:a="http://schemas.openxmlformats.org/drawingml/2006/main" r:embed="R21c1e19e277e40ec"/>
           <a:srcRect xmlns:a="http://schemas.openxmlformats.org/drawingml/2006/main" l="0" t="0" r="0" b="0"/>
           <a:stretch xmlns:a="http://schemas.openxmlformats.org/drawingml/2006/main">
             <a:fillRect l="0" t="0" r="0" b="0"/>
@@ -3222,7 +3222,7 @@
     </p:spTree>
     <p:extLst>
       <p:ext uri="{BB962C8B-B14F-4D97-AF65-F5344CB8AC3E}">
-        <p14:creationId xmlns:p14="http://schemas.microsoft.com/office/powerpoint/2010/main" val="1294197537"/>
+        <p14:creationId xmlns:p14="http://schemas.microsoft.com/office/powerpoint/2010/main" val="2144185144"/>
       </p:ext>
     </p:extLst>
   </p:cSld>
@@ -3246,7 +3246,7 @@
           <p:cNvPr id="2" name="">
             <a:extLst xmlns:a="http://schemas.openxmlformats.org/drawingml/2006/main">
               <a:ext uri="{FF2B5EF4-FFF2-40B4-BE49-F238E27FC236}">
-                <a16:creationId xmlns:a16="http://schemas.microsoft.com/office/drawing/2014/main" id="{FA983D2F-0F37-424F-A0F8-876B84C0B071}"/>
+                <a16:creationId xmlns:a16="http://schemas.microsoft.com/office/drawing/2014/main" id="{5FD09C6F-5BDF-469B-B039-DAF3A6E804C3}"/>
               </a:ext>
             </a:extLst>
           </p:cNvPr>
@@ -3256,7 +3256,7 @@
           <p:nvPr/>
         </p:nvPicPr>
         <p:blipFill>
-          <a:blip xmlns:r="http://schemas.openxmlformats.org/officeDocument/2006/relationships" xmlns:a="http://schemas.openxmlformats.org/drawingml/2006/main" r:embed="R9f0831108a40451a"/>
+          <a:blip xmlns:r="http://schemas.openxmlformats.org/officeDocument/2006/relationships" xmlns:a="http://schemas.openxmlformats.org/drawingml/2006/main" r:embed="R4a6fe381c0d7421b"/>
           <a:srcRect xmlns:a="http://schemas.openxmlformats.org/drawingml/2006/main" l="0" t="0" r="0" b="0"/>
           <a:stretch xmlns:a="http://schemas.openxmlformats.org/drawingml/2006/main">
             <a:fillRect l="0" t="0" r="0" b="0"/>
@@ -3275,7 +3275,7 @@
     </p:spTree>
     <p:extLst>
       <p:ext uri="{BB962C8B-B14F-4D97-AF65-F5344CB8AC3E}">
-        <p14:creationId xmlns:p14="http://schemas.microsoft.com/office/powerpoint/2010/main" val="1287186040"/>
+        <p14:creationId xmlns:p14="http://schemas.microsoft.com/office/powerpoint/2010/main" val="260550674"/>
       </p:ext>
     </p:extLst>
   </p:cSld>
@@ -3299,7 +3299,7 @@
           <p:cNvPr id="2" name="">
             <a:extLst xmlns:a="http://schemas.openxmlformats.org/drawingml/2006/main">
               <a:ext uri="{FF2B5EF4-FFF2-40B4-BE49-F238E27FC236}">
-                <a16:creationId xmlns:a16="http://schemas.microsoft.com/office/drawing/2014/main" id="{1BF63832-684E-46D7-A43B-A3D37B042E15}"/>
+                <a16:creationId xmlns:a16="http://schemas.microsoft.com/office/drawing/2014/main" id="{9CD22493-DCFA-4EE8-A722-49286AA044A4}"/>
               </a:ext>
             </a:extLst>
           </p:cNvPr>
@@ -3309,7 +3309,7 @@
           <p:nvPr/>
         </p:nvPicPr>
         <p:blipFill>
-          <a:blip xmlns:r="http://schemas.openxmlformats.org/officeDocument/2006/relationships" xmlns:a="http://schemas.openxmlformats.org/drawingml/2006/main" r:embed="R35414526773d445c"/>
+          <a:blip xmlns:r="http://schemas.openxmlformats.org/officeDocument/2006/relationships" xmlns:a="http://schemas.openxmlformats.org/drawingml/2006/main" r:embed="Rfeae794f7ce64220"/>
           <a:srcRect xmlns:a="http://schemas.openxmlformats.org/drawingml/2006/main" l="0" t="0" r="0" b="0"/>
           <a:stretch xmlns:a="http://schemas.openxmlformats.org/drawingml/2006/main">
             <a:fillRect l="0" t="0" r="0" b="0"/>
@@ -3328,7 +3328,7 @@
     </p:spTree>
     <p:extLst>
       <p:ext uri="{BB962C8B-B14F-4D97-AF65-F5344CB8AC3E}">
-        <p14:creationId xmlns:p14="http://schemas.microsoft.com/office/powerpoint/2010/main" val="982741621"/>
+        <p14:creationId xmlns:p14="http://schemas.microsoft.com/office/powerpoint/2010/main" val="1243156084"/>
       </p:ext>
     </p:extLst>
   </p:cSld>
@@ -3352,7 +3352,7 @@
           <p:cNvPr id="2" name="">
             <a:extLst xmlns:a="http://schemas.openxmlformats.org/drawingml/2006/main">
               <a:ext uri="{FF2B5EF4-FFF2-40B4-BE49-F238E27FC236}">
-                <a16:creationId xmlns:a16="http://schemas.microsoft.com/office/drawing/2014/main" id="{9683581A-185F-4DFF-A116-7EF9800609C9}"/>
+                <a16:creationId xmlns:a16="http://schemas.microsoft.com/office/drawing/2014/main" id="{EEDD4FAF-AA6D-4100-BDE5-F6139605C8A8}"/>
               </a:ext>
             </a:extLst>
           </p:cNvPr>
@@ -3362,7 +3362,7 @@
           <p:nvPr/>
         </p:nvPicPr>
         <p:blipFill>
-          <a:blip xmlns:r="http://schemas.openxmlformats.org/officeDocument/2006/relationships" xmlns:a="http://schemas.openxmlformats.org/drawingml/2006/main" r:embed="R457d49128f234d80"/>
+          <a:blip xmlns:r="http://schemas.openxmlformats.org/officeDocument/2006/relationships" xmlns:a="http://schemas.openxmlformats.org/drawingml/2006/main" r:embed="Ra217dda9c4b5481a"/>
           <a:srcRect xmlns:a="http://schemas.openxmlformats.org/drawingml/2006/main" l="0" t="0" r="0" b="0"/>
           <a:stretch xmlns:a="http://schemas.openxmlformats.org/drawingml/2006/main">
             <a:fillRect l="0" t="0" r="0" b="0"/>
@@ -3381,7 +3381,7 @@
     </p:spTree>
     <p:extLst>
       <p:ext uri="{BB962C8B-B14F-4D97-AF65-F5344CB8AC3E}">
-        <p14:creationId xmlns:p14="http://schemas.microsoft.com/office/powerpoint/2010/main" val="1746829883"/>
+        <p14:creationId xmlns:p14="http://schemas.microsoft.com/office/powerpoint/2010/main" val="1986409319"/>
       </p:ext>
     </p:extLst>
   </p:cSld>
@@ -3405,7 +3405,7 @@
           <p:cNvPr id="2" name="">
             <a:extLst xmlns:a="http://schemas.openxmlformats.org/drawingml/2006/main">
               <a:ext uri="{FF2B5EF4-FFF2-40B4-BE49-F238E27FC236}">
-                <a16:creationId xmlns:a16="http://schemas.microsoft.com/office/drawing/2014/main" id="{EB3764CC-9DDD-43BE-8B8B-F7BEEF9B4584}"/>
+                <a16:creationId xmlns:a16="http://schemas.microsoft.com/office/drawing/2014/main" id="{927EB20E-DB69-4693-A5DE-67F1746D724D}"/>
               </a:ext>
             </a:extLst>
           </p:cNvPr>
@@ -3415,7 +3415,7 @@
           <p:nvPr/>
         </p:nvPicPr>
         <p:blipFill>
-          <a:blip xmlns:r="http://schemas.openxmlformats.org/officeDocument/2006/relationships" xmlns:a="http://schemas.openxmlformats.org/drawingml/2006/main" r:embed="Rf877bbba30874b33"/>
+          <a:blip xmlns:r="http://schemas.openxmlformats.org/officeDocument/2006/relationships" xmlns:a="http://schemas.openxmlformats.org/drawingml/2006/main" r:embed="Rfd0acf5aa553459e"/>
           <a:srcRect xmlns:a="http://schemas.openxmlformats.org/drawingml/2006/main" l="0" t="0" r="0" b="0"/>
           <a:stretch xmlns:a="http://schemas.openxmlformats.org/drawingml/2006/main">
             <a:fillRect l="0" t="0" r="0" b="0"/>
@@ -3434,7 +3434,7 @@
     </p:spTree>
     <p:extLst>
       <p:ext uri="{BB962C8B-B14F-4D97-AF65-F5344CB8AC3E}">
-        <p14:creationId xmlns:p14="http://schemas.microsoft.com/office/powerpoint/2010/main" val="1141265964"/>
+        <p14:creationId xmlns:p14="http://schemas.microsoft.com/office/powerpoint/2010/main" val="1809812398"/>
       </p:ext>
     </p:extLst>
   </p:cSld>
@@ -3458,7 +3458,7 @@
           <p:cNvPr id="2" name="">
             <a:extLst xmlns:a="http://schemas.openxmlformats.org/drawingml/2006/main">
               <a:ext uri="{FF2B5EF4-FFF2-40B4-BE49-F238E27FC236}">
-                <a16:creationId xmlns:a16="http://schemas.microsoft.com/office/drawing/2014/main" id="{B1929098-F71C-48B8-9A54-453FBEE2E1ED}"/>
+                <a16:creationId xmlns:a16="http://schemas.microsoft.com/office/drawing/2014/main" id="{02BEA2E4-0B07-452B-9593-16A7C1BC3EE7}"/>
               </a:ext>
             </a:extLst>
           </p:cNvPr>
@@ -3468,7 +3468,7 @@
           <p:nvPr/>
         </p:nvPicPr>
         <p:blipFill>
-          <a:blip xmlns:r="http://schemas.openxmlformats.org/officeDocument/2006/relationships" xmlns:a="http://schemas.openxmlformats.org/drawingml/2006/main" r:embed="R04d88d19257f45c3"/>
+          <a:blip xmlns:r="http://schemas.openxmlformats.org/officeDocument/2006/relationships" xmlns:a="http://schemas.openxmlformats.org/drawingml/2006/main" r:embed="Raf5328867d2b4f31"/>
           <a:srcRect xmlns:a="http://schemas.openxmlformats.org/drawingml/2006/main" l="0" t="0" r="0" b="0"/>
           <a:stretch xmlns:a="http://schemas.openxmlformats.org/drawingml/2006/main">
             <a:fillRect l="0" t="0" r="0" b="0"/>
@@ -3487,7 +3487,7 @@
     </p:spTree>
     <p:extLst>
       <p:ext uri="{BB962C8B-B14F-4D97-AF65-F5344CB8AC3E}">
-        <p14:creationId xmlns:p14="http://schemas.microsoft.com/office/powerpoint/2010/main" val="1119226332"/>
+        <p14:creationId xmlns:p14="http://schemas.microsoft.com/office/powerpoint/2010/main" val="1385407389"/>
       </p:ext>
     </p:extLst>
   </p:cSld>
